--- a/public/fun/pack/pptx/weddingpro/결혼식프리미엄_29_오시는길중심_코냑크림.pptx
+++ b/public/fun/pack/pptx/weddingpro/결혼식프리미엄_29_오시는길중심_코냑크림.pptx
@@ -113,12 +113,12 @@
   <p:extLst>
     <p:ext uri="{521415D9-36F7-43E2-AB2F-B90AF26B5E84}">
       <p14:sectionLst xmlns:p14="http://schemas.microsoft.com/office/powerpoint/2010/main">
-        <p14:section name="시작" id="{C287308A-2EF1-44E2-BDC8-70E2974A1313}">
+        <p14:section name="시작" id="{0CE25B51-4245-4A9A-8141-1944242DCECF}">
           <p14:sldIdLst>
             <p14:sldId id="256"/>
           </p14:sldIdLst>
         </p14:section>
-        <p14:section name="본문" id="{9EC1880D-21A4-4900-8D61-14EB3F634880}">
+        <p14:section name="본문" id="{7507E642-0863-4B2A-95C5-9D83DE89CDFB}">
           <p14:sldIdLst>
             <p14:sldId id="257"/>
             <p14:sldId id="258"/>
@@ -127,7 +127,7 @@
             <p14:sldId id="261"/>
           </p14:sldIdLst>
         </p14:section>
-        <p14:section name="마무리" id="{D9569F5C-201E-4173-A90E-6039A20EE911}">
+        <p14:section name="마무리" id="{2EA6D7CA-9FE1-4C2A-AAA8-30D659C0DDD1}">
           <p14:sldIdLst>
             <p14:sldId id="262"/>
           </p14:sldIdLst>
@@ -1500,7 +1500,7 @@
             </a:lvl1pPr>
           </a:lstStyle>
           <a:p>
-            <a:fld id="{C531356A-E60E-4E8B-8D16-EA789F844EAA}" type="slidenum">
+            <a:fld id="{7EFA4B94-B610-4CE2-AC14-1689D846E6FD}" type="slidenum">
               <a:rPr lang="en-US"/>
               <a:t>‹#›</a:t>
             </a:fld>
@@ -2152,7 +2152,7 @@
             </a:lvl1pPr>
           </a:lstStyle>
           <a:p>
-            <a:fld id="{20A3C8DA-7CFB-4104-B7DB-D1677D7AF0F0}" type="slidenum">
+            <a:fld id="{671F8725-0F60-4AB5-A267-6FE7BED859E7}" type="slidenum">
               <a:rPr lang="en-US"/>
               <a:t>‹#›</a:t>
             </a:fld>
@@ -2836,7 +2836,7 @@
             </a:lvl1pPr>
           </a:lstStyle>
           <a:p>
-            <a:fld id="{A38ECD6F-092E-41FE-96E6-0A274272790E}" type="slidenum">
+            <a:fld id="{2A73D007-4011-427B-8CF6-83C74674626F}" type="slidenum">
               <a:rPr lang="en-US"/>
               <a:t>‹#›</a:t>
             </a:fld>
@@ -3687,7 +3687,7 @@
           <a:p>
             <a:r>
               <a:rPr lang="ko-KR"/>
-              <a:t>0000. 00. 00 · 예식장 이름</a:t>
+              <a:t>날짜 입력 · 예식장 이름</a:t>
             </a:r>
           </a:p>
         </p:txBody>
@@ -3922,7 +3922,7 @@
           <a:bodyPr/>
           <a:lstStyle/>
           <a:p>
-            <a:fld id="{98832207-72F0-4281-A622-AA5F88DC9C68}" type="slidenum">
+            <a:fld id="{68527601-28E7-4E0F-B951-638C94839417}" type="slidenum">
               <a:rPr lang="en-US"/>
               <a:t>‹#›</a:t>
             </a:fld>
@@ -4448,7 +4448,7 @@
           <a:bodyPr/>
           <a:lstStyle/>
           <a:p>
-            <a:fld id="{DE14C1B1-D94B-4100-A5A4-53A2039B908F}" type="slidenum">
+            <a:fld id="{8F9DF12F-5FCA-4E26-9751-D2D5F16CA707}" type="slidenum">
               <a:rPr lang="en-US"/>
               <a:t>‹#›</a:t>
             </a:fld>
@@ -4886,7 +4886,7 @@
           <a:bodyPr/>
           <a:lstStyle/>
           <a:p>
-            <a:fld id="{3A0FE046-CEF5-48DF-8EE1-93E3C0B3C833}" type="slidenum">
+            <a:fld id="{D8FA70BC-790E-41C8-B236-159251FFC959}" type="slidenum">
               <a:rPr lang="en-US"/>
               <a:t>‹#›</a:t>
             </a:fld>
@@ -6264,7 +6264,7 @@
           <a:bodyPr/>
           <a:lstStyle/>
           <a:p>
-            <a:fld id="{CE1F8D99-8822-470A-A42A-225BE4BB5F36}" type="slidenum">
+            <a:fld id="{2A926AAE-9FB4-4BB5-9CFD-191823CA1CF3}" type="slidenum">
               <a:rPr lang="en-US"/>
               <a:t>‹#›</a:t>
             </a:fld>
@@ -6352,7 +6352,7 @@
           <a:bodyPr/>
           <a:lstStyle/>
           <a:p>
-            <a:fld id="{8C398DA8-12D8-4FE0-9A3B-A9707F049C5A}" type="slidenum">
+            <a:fld id="{2C0D3614-67E0-40DF-A721-B252B3EBAC01}" type="slidenum">
               <a:rPr lang="en-US"/>
               <a:t>‹#›</a:t>
             </a:fld>
